--- a/examples/output/pptx/02-advanced.pptx
+++ b/examples/output/pptx/02-advanced.pptx
@@ -2,9 +2,9 @@
 <file path=ppt/presentation.xml><?xml version="1.0" encoding="utf-8"?>
 <p:presentation xmlns:p="http://schemas.openxmlformats.org/presentationml/2006/main">
   <p:sldIdLst>
-    <p:sldId xmlns:r="http://schemas.openxmlformats.org/officeDocument/2006/relationships" id="257" r:id="Rc690264bdbb44e5a"/>
-    <p:sldId xmlns:r="http://schemas.openxmlformats.org/officeDocument/2006/relationships" id="258" r:id="R8a08dc74b701492a"/>
-    <p:sldId xmlns:r="http://schemas.openxmlformats.org/officeDocument/2006/relationships" id="259" r:id="R3da4025ee2d1430a"/>
+    <p:sldId xmlns:r="http://schemas.openxmlformats.org/officeDocument/2006/relationships" id="257" r:id="Rf6c6567c7df14f7c"/>
+    <p:sldId xmlns:r="http://schemas.openxmlformats.org/officeDocument/2006/relationships" id="258" r:id="Rb359c06a256e4bbe"/>
+    <p:sldId xmlns:r="http://schemas.openxmlformats.org/officeDocument/2006/relationships" id="259" r:id="R83064a0da436462c"/>
   </p:sldIdLst>
 </p:presentation>
 </file>
@@ -59,7 +59,7 @@
   </p:cSld>
   <p:clrMap/>
   <p:sldLayoutIdLst>
-    <p:sldLayoutId xmlns:r="http://schemas.openxmlformats.org/officeDocument/2006/relationships" id="1" r:id="R298dd38d90c34051"/>
+    <p:sldLayoutId xmlns:r="http://schemas.openxmlformats.org/officeDocument/2006/relationships" id="1" r:id="R0fe6e708c2684da5"/>
   </p:sldLayoutIdLst>
 </p:sldMaster>
 </file>
